--- a/a7/packages/A7 Unit 6 - Relationships in Triangles/Lessons/6.05/A7 6.05 Distance on the Coordinate Plane - Slides.pptx
+++ b/a7/packages/A7 Unit 6 - Relationships in Triangles/Lessons/6.05/A7 6.05 Distance on the Coordinate Plane - Slides.pptx
@@ -8004,7 +8004,7 @@
         <p:spPr>
           <a:xfrm>
             <a:off x="1874519" y="1440180"/>
-            <a:ext cx="9309514" cy="457200"/>
+            <a:ext cx="9311562" cy="457200"/>
           </a:xfrm>
           <a:prstGeom prst="rect">
             <a:avLst/>
@@ -8025,7 +8025,7 @@
                 </a:solidFill>
                 <a:latin typeface="Lexend"/>
               </a:rPr>
-              <a:t>1.   A 25-ft ladder reaches 24 ft up a wall. How far out is its foot?</a:t>
+              <a:t>1.   A 25-ft ladder reaches 20 ft up a wall. How far out is its foot?</a:t>
             </a:r>
           </a:p>
         </p:txBody>
@@ -8039,7 +8039,7 @@
         <p:spPr>
           <a:xfrm>
             <a:off x="1874519" y="2052828"/>
-            <a:ext cx="7254747" cy="457200"/>
+            <a:ext cx="7409813" cy="457200"/>
           </a:xfrm>
           <a:prstGeom prst="rect">
             <a:avLst/>
@@ -8060,7 +8060,7 @@
                 </a:solidFill>
                 <a:latin typeface="Lexend"/>
               </a:rPr>
-              <a:t>2.   Do sides of 8, 15 and 17 make a right triangle?</a:t>
+              <a:t>2.   Do sides of 12, 35 and 37 make a right triangle?</a:t>
             </a:r>
           </a:p>
         </p:txBody>
@@ -13609,7 +13609,7 @@
         <p:spPr>
           <a:xfrm>
             <a:off x="1874519" y="1440180"/>
-            <a:ext cx="9309514" cy="457200"/>
+            <a:ext cx="9311562" cy="457200"/>
           </a:xfrm>
           <a:prstGeom prst="rect">
             <a:avLst/>
@@ -13630,7 +13630,7 @@
                 </a:solidFill>
                 <a:latin typeface="Lexend"/>
               </a:rPr>
-              <a:t>1.   A 25-ft ladder reaches 24 ft up a wall. How far out is its foot?</a:t>
+              <a:t>1.   A 25-ft ladder reaches 20 ft up a wall. How far out is its foot?</a:t>
             </a:r>
           </a:p>
         </p:txBody>
@@ -13644,7 +13644,7 @@
         <p:spPr>
           <a:xfrm>
             <a:off x="2606040" y="1897380"/>
-            <a:ext cx="700636" cy="457200"/>
+            <a:ext cx="878282" cy="457200"/>
           </a:xfrm>
           <a:prstGeom prst="rect">
             <a:avLst/>
@@ -13665,7 +13665,7 @@
                 </a:solidFill>
                 <a:latin typeface="Lexend"/>
               </a:rPr>
-              <a:t>7 ft</a:t>
+              <a:t>15 ft</a:t>
             </a:r>
           </a:p>
         </p:txBody>
@@ -13679,7 +13679,7 @@
         <p:spPr>
           <a:xfrm>
             <a:off x="1874519" y="2510028"/>
-            <a:ext cx="7254747" cy="457200"/>
+            <a:ext cx="7409813" cy="457200"/>
           </a:xfrm>
           <a:prstGeom prst="rect">
             <a:avLst/>
@@ -13700,7 +13700,7 @@
                 </a:solidFill>
                 <a:latin typeface="Lexend"/>
               </a:rPr>
-              <a:t>2.   Do sides of 8, 15 and 17 make a right triangle?</a:t>
+              <a:t>2.   Do sides of 12, 35 and 37 make a right triangle?</a:t>
             </a:r>
           </a:p>
         </p:txBody>
@@ -13714,7 +13714,7 @@
         <p:spPr>
           <a:xfrm>
             <a:off x="2606040" y="2967228"/>
-            <a:ext cx="4081502" cy="457200"/>
+            <a:ext cx="4785391" cy="457200"/>
           </a:xfrm>
           <a:prstGeom prst="rect">
             <a:avLst/>
@@ -13735,7 +13735,7 @@
                 </a:solidFill>
                 <a:latin typeface="Lexend"/>
               </a:rPr>
-              <a:t>Yes — 64 + 225 = 289 = 17</a:t>
+              <a:t>Yes — 144 + 1,225 = 1,369 = 37</a:t>
             </a:r>
             <a:r>
               <a:rPr sz="2180" b="1" i="0" baseline="30000">

--- a/a7/packages/A7 Unit 6 - Relationships in Triangles/Lessons/6.05/A7 6.05 Distance on the Coordinate Plane - Slides.pptx
+++ b/a7/packages/A7 Unit 6 - Relationships in Triangles/Lessons/6.05/A7 6.05 Distance on the Coordinate Plane - Slides.pptx
@@ -17871,7 +17871,7 @@
                 </a:solidFill>
                 <a:latin typeface="Lexend"/>
               </a:rPr>
-              <a:t>Every skill listed is required, to a SmartScore of 67. Due at the start of the next class.</a:t>
+              <a:t>Every skill listed is required, to a SmartScore of 67. Due by the Unit 6 test.</a:t>
             </a:r>
           </a:p>
         </p:txBody>

--- a/a7/packages/A7 Unit 6 - Relationships in Triangles/Lessons/6.05/A7 6.05 Distance on the Coordinate Plane - Slides.pptx
+++ b/a7/packages/A7 Unit 6 - Relationships in Triangles/Lessons/6.05/A7 6.05 Distance on the Coordinate Plane - Slides.pptx
@@ -5293,7 +5293,7 @@
         </p:nvSpPr>
         <p:spPr>
           <a:xfrm>
-            <a:off x="1082528" y="1577340"/>
+            <a:off x="1139487" y="1577340"/>
             <a:ext cx="4220231" cy="457200"/>
           </a:xfrm>
           <a:prstGeom prst="rect">
@@ -5322,7 +5322,7 @@
       </p:sp>
       <p:pic>
         <p:nvPicPr>
-          <p:cNvPr id="9" name="Picture 8" descr="4d7650af90a23647.png"/>
+          <p:cNvPr id="9" name="Picture 8" descr="3880271116b9ce96.png"/>
           <p:cNvPicPr>
             <a:picLocks noChangeAspect="1"/>
           </p:cNvPicPr>
@@ -5336,8 +5336,8 @@
         </p:blipFill>
         <p:spPr>
           <a:xfrm>
-            <a:off x="5165599" y="1699831"/>
-            <a:ext cx="1168908" cy="279844"/>
+            <a:off x="5222559" y="1699831"/>
+            <a:ext cx="1054989" cy="279844"/>
           </a:xfrm>
           <a:prstGeom prst="rect">
             <a:avLst/>
@@ -5352,7 +5352,7 @@
         </p:nvSpPr>
         <p:spPr>
           <a:xfrm>
-            <a:off x="6334507" y="1577340"/>
+            <a:off x="6277548" y="1577340"/>
             <a:ext cx="953666" cy="457200"/>
           </a:xfrm>
           <a:prstGeom prst="rect">
@@ -5395,7 +5395,7 @@
         </p:blipFill>
         <p:spPr>
           <a:xfrm>
-            <a:off x="7151014" y="1697355"/>
+            <a:off x="7094054" y="1697355"/>
             <a:ext cx="676084" cy="282321"/>
           </a:xfrm>
           <a:prstGeom prst="rect">
@@ -5411,7 +5411,7 @@
         </p:nvSpPr>
         <p:spPr>
           <a:xfrm>
-            <a:off x="7827098" y="1577340"/>
+            <a:off x="7770139" y="1577340"/>
             <a:ext cx="3389053" cy="457200"/>
           </a:xfrm>
           <a:prstGeom prst="rect">
@@ -5674,7 +5674,7 @@
         </p:nvSpPr>
         <p:spPr>
           <a:xfrm>
-            <a:off x="1080051" y="1577340"/>
+            <a:off x="1137011" y="1577340"/>
             <a:ext cx="4220231" cy="457200"/>
           </a:xfrm>
           <a:prstGeom prst="rect">
@@ -5703,7 +5703,7 @@
       </p:sp>
       <p:pic>
         <p:nvPicPr>
-          <p:cNvPr id="9" name="Picture 8" descr="fd1e2597f8d8f83c.png"/>
+          <p:cNvPr id="9" name="Picture 8" descr="80615cb9324181a0.png"/>
           <p:cNvPicPr>
             <a:picLocks noChangeAspect="1"/>
           </p:cNvPicPr>
@@ -5717,8 +5717,8 @@
         </p:blipFill>
         <p:spPr>
           <a:xfrm>
-            <a:off x="5163123" y="1697355"/>
-            <a:ext cx="1171384" cy="282321"/>
+            <a:off x="5220082" y="1697355"/>
+            <a:ext cx="1057465" cy="282321"/>
           </a:xfrm>
           <a:prstGeom prst="rect">
             <a:avLst/>
@@ -5733,7 +5733,7 @@
         </p:nvSpPr>
         <p:spPr>
           <a:xfrm>
-            <a:off x="6334507" y="1577340"/>
+            <a:off x="6277548" y="1577340"/>
             <a:ext cx="953666" cy="457200"/>
           </a:xfrm>
           <a:prstGeom prst="rect">
@@ -5776,7 +5776,7 @@
         </p:blipFill>
         <p:spPr>
           <a:xfrm>
-            <a:off x="7151014" y="1694878"/>
+            <a:off x="7094054" y="1694878"/>
             <a:ext cx="678561" cy="284797"/>
           </a:xfrm>
           <a:prstGeom prst="rect">
@@ -5792,7 +5792,7 @@
         </p:nvSpPr>
         <p:spPr>
           <a:xfrm>
-            <a:off x="7829575" y="1577340"/>
+            <a:off x="7772615" y="1577340"/>
             <a:ext cx="3389053" cy="457200"/>
           </a:xfrm>
           <a:prstGeom prst="rect">
@@ -6320,7 +6320,7 @@
       </p:sp>
       <p:pic>
         <p:nvPicPr>
-          <p:cNvPr id="9" name="Picture 8" descr="c3f1c5f11e201d5b.png"/>
+          <p:cNvPr id="9" name="Picture 8" descr="a6597be3d74db642.png"/>
           <p:cNvPicPr>
             <a:picLocks noChangeAspect="1"/>
           </p:cNvPicPr>
@@ -6335,7 +6335,7 @@
         <p:spPr>
           <a:xfrm>
             <a:off x="4232403" y="1974151"/>
-            <a:ext cx="1191196" cy="279844"/>
+            <a:ext cx="1074801" cy="279844"/>
           </a:xfrm>
           <a:prstGeom prst="rect">
             <a:avLst/>
@@ -6350,7 +6350,7 @@
         </p:nvSpPr>
         <p:spPr>
           <a:xfrm>
-            <a:off x="5423599" y="1851660"/>
+            <a:off x="5307204" y="1851660"/>
             <a:ext cx="1004622" cy="457200"/>
           </a:xfrm>
           <a:prstGeom prst="rect">
@@ -6393,7 +6393,7 @@
         </p:blipFill>
         <p:spPr>
           <a:xfrm>
-            <a:off x="6291062" y="1969198"/>
+            <a:off x="6174667" y="1969198"/>
             <a:ext cx="874204" cy="284797"/>
           </a:xfrm>
           <a:prstGeom prst="rect">
@@ -6409,7 +6409,7 @@
         </p:nvSpPr>
         <p:spPr>
           <a:xfrm>
-            <a:off x="7165267" y="1851660"/>
+            <a:off x="7048871" y="1851660"/>
             <a:ext cx="374819" cy="457200"/>
           </a:xfrm>
           <a:prstGeom prst="rect">
@@ -6736,7 +6736,7 @@
       </p:sp>
       <p:pic>
         <p:nvPicPr>
-          <p:cNvPr id="9" name="Picture 8" descr="73f0f8823578f159.png"/>
+          <p:cNvPr id="9" name="Picture 8" descr="5fd5df3d6d682a43.png"/>
           <p:cNvPicPr>
             <a:picLocks noChangeAspect="1"/>
           </p:cNvPicPr>
@@ -6751,7 +6751,7 @@
         <p:spPr>
           <a:xfrm>
             <a:off x="4232403" y="1971675"/>
-            <a:ext cx="1193673" cy="282321"/>
+            <a:ext cx="1077277" cy="282321"/>
           </a:xfrm>
           <a:prstGeom prst="rect">
             <a:avLst/>
@@ -6766,7 +6766,7 @@
         </p:nvSpPr>
         <p:spPr>
           <a:xfrm>
-            <a:off x="5426076" y="1851660"/>
+            <a:off x="5309680" y="1851660"/>
             <a:ext cx="1004622" cy="457200"/>
           </a:xfrm>
           <a:prstGeom prst="rect">
@@ -6809,7 +6809,7 @@
         </p:blipFill>
         <p:spPr>
           <a:xfrm>
-            <a:off x="6293539" y="1966722"/>
+            <a:off x="6177143" y="1966722"/>
             <a:ext cx="876681" cy="287274"/>
           </a:xfrm>
           <a:prstGeom prst="rect">
@@ -6825,7 +6825,7 @@
         </p:nvSpPr>
         <p:spPr>
           <a:xfrm>
-            <a:off x="7170220" y="1851660"/>
+            <a:off x="7053824" y="1851660"/>
             <a:ext cx="374819" cy="457200"/>
           </a:xfrm>
           <a:prstGeom prst="rect">
@@ -8196,7 +8196,7 @@
       </p:sp>
       <p:pic>
         <p:nvPicPr>
-          <p:cNvPr id="14" name="Picture 13" descr="26b57b6476f69a56.png"/>
+          <p:cNvPr id="14" name="Picture 13" descr="14ee079d1637d965.png"/>
           <p:cNvPicPr>
             <a:picLocks noChangeAspect="1"/>
           </p:cNvPicPr>
@@ -8211,7 +8211,7 @@
         <p:spPr>
           <a:xfrm>
             <a:off x="6540780" y="3402663"/>
-            <a:ext cx="939831" cy="270557"/>
+            <a:ext cx="830659" cy="270557"/>
           </a:xfrm>
           <a:prstGeom prst="rect">
             <a:avLst/>
@@ -8226,7 +8226,7 @@
         </p:nvSpPr>
         <p:spPr>
           <a:xfrm>
-            <a:off x="7480612" y="3278124"/>
+            <a:off x="7371439" y="3278124"/>
             <a:ext cx="360631" cy="457200"/>
           </a:xfrm>
           <a:prstGeom prst="rect">
@@ -9550,7 +9550,7 @@
       </p:sp>
       <p:pic>
         <p:nvPicPr>
-          <p:cNvPr id="9" name="Picture 8" descr="99a62bdd266be7e7.png"/>
+          <p:cNvPr id="9" name="Picture 8" descr="0691fbdd0b8a9de3.png"/>
           <p:cNvPicPr>
             <a:picLocks noChangeAspect="1"/>
           </p:cNvPicPr>
@@ -9565,7 +9565,7 @@
         <p:spPr>
           <a:xfrm>
             <a:off x="4232403" y="1974151"/>
-            <a:ext cx="1411605" cy="279844"/>
+            <a:ext cx="1295209" cy="279844"/>
           </a:xfrm>
           <a:prstGeom prst="rect">
             <a:avLst/>
@@ -9580,7 +9580,7 @@
         </p:nvSpPr>
         <p:spPr>
           <a:xfrm>
-            <a:off x="5644008" y="1851660"/>
+            <a:off x="5527612" y="1851660"/>
             <a:ext cx="1004622" cy="457200"/>
           </a:xfrm>
           <a:prstGeom prst="rect">
@@ -9623,7 +9623,7 @@
         </p:blipFill>
         <p:spPr>
           <a:xfrm>
-            <a:off x="6511471" y="1969198"/>
+            <a:off x="6395075" y="1969198"/>
             <a:ext cx="894016" cy="284797"/>
           </a:xfrm>
           <a:prstGeom prst="rect">
@@ -9639,7 +9639,7 @@
         </p:nvSpPr>
         <p:spPr>
           <a:xfrm>
-            <a:off x="7405487" y="1851660"/>
+            <a:off x="7289092" y="1851660"/>
             <a:ext cx="374819" cy="457200"/>
           </a:xfrm>
           <a:prstGeom prst="rect">
@@ -9990,7 +9990,7 @@
       </p:sp>
       <p:pic>
         <p:nvPicPr>
-          <p:cNvPr id="9" name="Picture 8" descr="7f404ed3578af3e8.png"/>
+          <p:cNvPr id="9" name="Picture 8" descr="a54c215aeb101994.png"/>
           <p:cNvPicPr>
             <a:picLocks noChangeAspect="1"/>
           </p:cNvPicPr>
@@ -10005,7 +10005,7 @@
         <p:spPr>
           <a:xfrm>
             <a:off x="4232403" y="1971675"/>
-            <a:ext cx="1414081" cy="282321"/>
+            <a:ext cx="1297686" cy="282321"/>
           </a:xfrm>
           <a:prstGeom prst="rect">
             <a:avLst/>
@@ -10020,7 +10020,7 @@
         </p:nvSpPr>
         <p:spPr>
           <a:xfrm>
-            <a:off x="5646484" y="1851660"/>
+            <a:off x="5530089" y="1851660"/>
             <a:ext cx="1004622" cy="457200"/>
           </a:xfrm>
           <a:prstGeom prst="rect">
@@ -10063,7 +10063,7 @@
         </p:blipFill>
         <p:spPr>
           <a:xfrm>
-            <a:off x="6513947" y="1966722"/>
+            <a:off x="6397552" y="1966722"/>
             <a:ext cx="896493" cy="287274"/>
           </a:xfrm>
           <a:prstGeom prst="rect">
@@ -10079,7 +10079,7 @@
         </p:nvSpPr>
         <p:spPr>
           <a:xfrm>
-            <a:off x="7410440" y="1851660"/>
+            <a:off x="7294045" y="1851660"/>
             <a:ext cx="374819" cy="457200"/>
           </a:xfrm>
           <a:prstGeom prst="rect">
@@ -10513,7 +10513,7 @@
       </p:sp>
       <p:pic>
         <p:nvPicPr>
-          <p:cNvPr id="9" name="Picture 8" descr="cb503a1a696b254e.png"/>
+          <p:cNvPr id="9" name="Picture 8" descr="94e952a37bd3c5e3.png"/>
           <p:cNvPicPr>
             <a:picLocks noChangeAspect="1"/>
           </p:cNvPicPr>
@@ -10528,7 +10528,7 @@
         <p:spPr>
           <a:xfrm>
             <a:off x="4232403" y="1971675"/>
-            <a:ext cx="1386840" cy="282321"/>
+            <a:ext cx="1270444" cy="282321"/>
           </a:xfrm>
           <a:prstGeom prst="rect">
             <a:avLst/>
@@ -10543,7 +10543,7 @@
         </p:nvSpPr>
         <p:spPr>
           <a:xfrm>
-            <a:off x="5619243" y="1851660"/>
+            <a:off x="5502847" y="1851660"/>
             <a:ext cx="1004622" cy="457200"/>
           </a:xfrm>
           <a:prstGeom prst="rect">
@@ -10586,7 +10586,7 @@
         </p:blipFill>
         <p:spPr>
           <a:xfrm>
-            <a:off x="6486706" y="1974151"/>
+            <a:off x="6370310" y="1974151"/>
             <a:ext cx="896493" cy="279844"/>
           </a:xfrm>
           <a:prstGeom prst="rect">
@@ -10602,7 +10602,7 @@
         </p:nvSpPr>
         <p:spPr>
           <a:xfrm>
-            <a:off x="7383199" y="1851660"/>
+            <a:off x="7266803" y="1851660"/>
             <a:ext cx="3646129" cy="457200"/>
           </a:xfrm>
           <a:prstGeom prst="rect">
@@ -10953,7 +10953,7 @@
       </p:sp>
       <p:pic>
         <p:nvPicPr>
-          <p:cNvPr id="9" name="Picture 8" descr="711531d20504cf82.png"/>
+          <p:cNvPr id="9" name="Picture 8" descr="f67d1259734e5c0e.png"/>
           <p:cNvPicPr>
             <a:picLocks noChangeAspect="1"/>
           </p:cNvPicPr>
@@ -10968,7 +10968,7 @@
         <p:spPr>
           <a:xfrm>
             <a:off x="4232403" y="1969198"/>
-            <a:ext cx="1389316" cy="284797"/>
+            <a:ext cx="1272921" cy="284797"/>
           </a:xfrm>
           <a:prstGeom prst="rect">
             <a:avLst/>
@@ -10983,7 +10983,7 @@
         </p:nvSpPr>
         <p:spPr>
           <a:xfrm>
-            <a:off x="5621719" y="1851660"/>
+            <a:off x="5505324" y="1851660"/>
             <a:ext cx="1004622" cy="457200"/>
           </a:xfrm>
           <a:prstGeom prst="rect">
@@ -11026,7 +11026,7 @@
         </p:blipFill>
         <p:spPr>
           <a:xfrm>
-            <a:off x="6489182" y="1971675"/>
+            <a:off x="6372787" y="1971675"/>
             <a:ext cx="898969" cy="282321"/>
           </a:xfrm>
           <a:prstGeom prst="rect">
@@ -11042,7 +11042,7 @@
         </p:nvSpPr>
         <p:spPr>
           <a:xfrm>
-            <a:off x="7388152" y="1851660"/>
+            <a:off x="7271756" y="1851660"/>
             <a:ext cx="3646129" cy="457200"/>
           </a:xfrm>
           <a:prstGeom prst="rect">
@@ -11535,7 +11535,7 @@
       </p:sp>
       <p:pic>
         <p:nvPicPr>
-          <p:cNvPr id="11" name="Picture 10" descr="3a95cfae893827a3.png"/>
+          <p:cNvPr id="11" name="Picture 10" descr="f481fc1d2fe87082.png"/>
           <p:cNvPicPr>
             <a:picLocks noChangeAspect="1"/>
           </p:cNvPicPr>
@@ -11550,7 +11550,7 @@
         <p:spPr>
           <a:xfrm>
             <a:off x="8282312" y="1971675"/>
-            <a:ext cx="1149096" cy="282321"/>
+            <a:ext cx="1032700" cy="282321"/>
           </a:xfrm>
           <a:prstGeom prst="rect">
             <a:avLst/>
@@ -11565,7 +11565,7 @@
         </p:nvSpPr>
         <p:spPr>
           <a:xfrm>
-            <a:off x="9431408" y="1851660"/>
+            <a:off x="9315012" y="1851660"/>
             <a:ext cx="374819" cy="457200"/>
           </a:xfrm>
           <a:prstGeom prst="rect">
@@ -12187,7 +12187,7 @@
       </p:sp>
       <p:pic>
         <p:nvPicPr>
-          <p:cNvPr id="11" name="Picture 10" descr="7cb372c2035acbda.png"/>
+          <p:cNvPr id="11" name="Picture 10" descr="218ca33af7e8108c.png"/>
           <p:cNvPicPr>
             <a:picLocks noChangeAspect="1"/>
           </p:cNvPicPr>
@@ -12202,7 +12202,7 @@
         <p:spPr>
           <a:xfrm>
             <a:off x="8284788" y="1969198"/>
-            <a:ext cx="1151572" cy="284797"/>
+            <a:ext cx="1035177" cy="284797"/>
           </a:xfrm>
           <a:prstGeom prst="rect">
             <a:avLst/>
@@ -12217,7 +12217,7 @@
         </p:nvSpPr>
         <p:spPr>
           <a:xfrm>
-            <a:off x="9436361" y="1851660"/>
+            <a:off x="9319965" y="1851660"/>
             <a:ext cx="374819" cy="457200"/>
           </a:xfrm>
           <a:prstGeom prst="rect">
@@ -12722,7 +12722,7 @@
       </p:sp>
       <p:pic>
         <p:nvPicPr>
-          <p:cNvPr id="9" name="Picture 8" descr="87c765902c21e7db.png"/>
+          <p:cNvPr id="9" name="Picture 8" descr="7048afd5967e5b74.png"/>
           <p:cNvPicPr>
             <a:picLocks noChangeAspect="1"/>
           </p:cNvPicPr>
@@ -12737,7 +12737,7 @@
         <p:spPr>
           <a:xfrm>
             <a:off x="2994178" y="1971675"/>
-            <a:ext cx="1151572" cy="282321"/>
+            <a:ext cx="1035177" cy="282321"/>
           </a:xfrm>
           <a:prstGeom prst="rect">
             <a:avLst/>
@@ -12752,7 +12752,7 @@
         </p:nvSpPr>
         <p:spPr>
           <a:xfrm>
-            <a:off x="4145750" y="1851660"/>
+            <a:off x="4029355" y="1851660"/>
             <a:ext cx="2844375" cy="457200"/>
           </a:xfrm>
           <a:prstGeom prst="rect">
@@ -13079,7 +13079,7 @@
       </p:sp>
       <p:pic>
         <p:nvPicPr>
-          <p:cNvPr id="9" name="Picture 8" descr="2dd890084e815386.png"/>
+          <p:cNvPr id="9" name="Picture 8" descr="66de72f5c26fc08c.png"/>
           <p:cNvPicPr>
             <a:picLocks noChangeAspect="1"/>
           </p:cNvPicPr>
@@ -13094,7 +13094,7 @@
         <p:spPr>
           <a:xfrm>
             <a:off x="2994178" y="1969198"/>
-            <a:ext cx="1154049" cy="284797"/>
+            <a:ext cx="1037653" cy="284797"/>
           </a:xfrm>
           <a:prstGeom prst="rect">
             <a:avLst/>
@@ -13109,7 +13109,7 @@
         </p:nvSpPr>
         <p:spPr>
           <a:xfrm>
-            <a:off x="4148227" y="1851660"/>
+            <a:off x="4031831" y="1851660"/>
             <a:ext cx="2844375" cy="457200"/>
           </a:xfrm>
           <a:prstGeom prst="rect">
@@ -13915,7 +13915,7 @@
       </p:sp>
       <p:pic>
         <p:nvPicPr>
-          <p:cNvPr id="17" name="Picture 16" descr="26b57b6476f69a56.png"/>
+          <p:cNvPr id="17" name="Picture 16" descr="14ee079d1637d965.png"/>
           <p:cNvPicPr>
             <a:picLocks noChangeAspect="1"/>
           </p:cNvPicPr>
@@ -13930,7 +13930,7 @@
         <p:spPr>
           <a:xfrm>
             <a:off x="6540780" y="4774263"/>
-            <a:ext cx="939831" cy="270557"/>
+            <a:ext cx="830659" cy="270557"/>
           </a:xfrm>
           <a:prstGeom prst="rect">
             <a:avLst/>
@@ -13945,7 +13945,7 @@
         </p:nvSpPr>
         <p:spPr>
           <a:xfrm>
-            <a:off x="7480612" y="4649724"/>
+            <a:off x="7371439" y="4649724"/>
             <a:ext cx="360631" cy="457200"/>
           </a:xfrm>
           <a:prstGeom prst="rect">
@@ -13980,7 +13980,7 @@
         </p:nvSpPr>
         <p:spPr>
           <a:xfrm>
-            <a:off x="8252723" y="4649724"/>
+            <a:off x="8143551" y="4649724"/>
             <a:ext cx="386509" cy="457200"/>
           </a:xfrm>
           <a:prstGeom prst="rect">
@@ -16594,7 +16594,7 @@
       </p:sp>
       <p:pic>
         <p:nvPicPr>
-          <p:cNvPr id="16" name="Picture 15" descr="54a04eef7073b81f.png"/>
+          <p:cNvPr id="16" name="Picture 15" descr="b46983e41caf496f.png"/>
           <p:cNvPicPr>
             <a:picLocks noChangeAspect="1"/>
           </p:cNvPicPr>
@@ -16609,7 +16609,7 @@
         <p:spPr>
           <a:xfrm>
             <a:off x="5470546" y="2177795"/>
-            <a:ext cx="990599" cy="280416"/>
+            <a:ext cx="874776" cy="280416"/>
           </a:xfrm>
           <a:prstGeom prst="rect">
             <a:avLst/>
@@ -16624,7 +16624,7 @@
         </p:nvSpPr>
         <p:spPr>
           <a:xfrm>
-            <a:off x="6461146" y="2089403"/>
+            <a:off x="6345322" y="2089403"/>
             <a:ext cx="922743" cy="457200"/>
           </a:xfrm>
           <a:prstGeom prst="rect">
@@ -16667,7 +16667,7 @@
         </p:blipFill>
         <p:spPr>
           <a:xfrm>
-            <a:off x="7246730" y="2177795"/>
+            <a:off x="7130906" y="2177795"/>
             <a:ext cx="719328" cy="280416"/>
           </a:xfrm>
           <a:prstGeom prst="rect">
@@ -16683,7 +16683,7 @@
         </p:nvSpPr>
         <p:spPr>
           <a:xfrm>
-            <a:off x="7966058" y="2089403"/>
+            <a:off x="7850234" y="2089403"/>
             <a:ext cx="277353" cy="457200"/>
           </a:xfrm>
           <a:prstGeom prst="rect">
@@ -16841,7 +16841,7 @@
       </p:sp>
       <p:pic>
         <p:nvPicPr>
-          <p:cNvPr id="24" name="Picture 23" descr="5eb0c83aac6e3815.png"/>
+          <p:cNvPr id="24" name="Picture 23" descr="9a3929db1861857f.png"/>
           <p:cNvPicPr>
             <a:picLocks noChangeAspect="1"/>
           </p:cNvPicPr>
@@ -16856,7 +16856,7 @@
         <p:spPr>
           <a:xfrm>
             <a:off x="7109570" y="2772155"/>
-            <a:ext cx="1014984" cy="280416"/>
+            <a:ext cx="899160" cy="280416"/>
           </a:xfrm>
           <a:prstGeom prst="rect">
             <a:avLst/>
@@ -16871,7 +16871,7 @@
         </p:nvSpPr>
         <p:spPr>
           <a:xfrm>
-            <a:off x="8124554" y="2683763"/>
+            <a:off x="8008730" y="2683763"/>
             <a:ext cx="277353" cy="457200"/>
           </a:xfrm>
           <a:prstGeom prst="rect">
@@ -17029,7 +17029,7 @@
       </p:sp>
       <p:pic>
         <p:nvPicPr>
-          <p:cNvPr id="30" name="Picture 29" descr="30a7ddc4d05885a6.png"/>
+          <p:cNvPr id="30" name="Picture 29" descr="9cc9d23d4888b00d.png"/>
           <p:cNvPicPr>
             <a:picLocks noChangeAspect="1"/>
           </p:cNvPicPr>
@@ -17044,7 +17044,7 @@
         <p:spPr>
           <a:xfrm>
             <a:off x="7133954" y="3364991"/>
-            <a:ext cx="972311" cy="283464"/>
+            <a:ext cx="856488" cy="283464"/>
           </a:xfrm>
           <a:prstGeom prst="rect">
             <a:avLst/>
@@ -17059,7 +17059,7 @@
         </p:nvSpPr>
         <p:spPr>
           <a:xfrm>
-            <a:off x="8106266" y="3278123"/>
+            <a:off x="7990442" y="3278123"/>
             <a:ext cx="3256667" cy="457200"/>
           </a:xfrm>
           <a:prstGeom prst="rect">
@@ -17287,7 +17287,7 @@
       </p:sp>
       <p:pic>
         <p:nvPicPr>
-          <p:cNvPr id="38" name="Picture 37" descr="8c6f3e57d36ddd4e.png"/>
+          <p:cNvPr id="38" name="Picture 37" descr="059c3899fa754e3d.png"/>
           <p:cNvPicPr>
             <a:picLocks noChangeAspect="1"/>
           </p:cNvPicPr>
@@ -17302,7 +17302,7 @@
         <p:spPr>
           <a:xfrm>
             <a:off x="6754582" y="4553712"/>
-            <a:ext cx="1164336" cy="283464"/>
+            <a:ext cx="1048512" cy="283464"/>
           </a:xfrm>
           <a:prstGeom prst="rect">
             <a:avLst/>
@@ -17317,7 +17317,7 @@
         </p:nvSpPr>
         <p:spPr>
           <a:xfrm>
-            <a:off x="7918918" y="4466844"/>
+            <a:off x="7803094" y="4466844"/>
             <a:ext cx="2312587" cy="457200"/>
           </a:xfrm>
           <a:prstGeom prst="rect">
@@ -17346,7 +17346,7 @@
       </p:sp>
       <p:pic>
         <p:nvPicPr>
-          <p:cNvPr id="40" name="Picture 39" descr="1d6b3c1823f8861a.png"/>
+          <p:cNvPr id="40" name="Picture 39" descr="58e193b7312e2800.png"/>
           <p:cNvPicPr>
             <a:picLocks noChangeAspect="1"/>
           </p:cNvPicPr>
@@ -17360,8 +17360,8 @@
         </p:blipFill>
         <p:spPr>
           <a:xfrm>
-            <a:off x="10094345" y="4553712"/>
-            <a:ext cx="688848" cy="283464"/>
+            <a:off x="9978521" y="4553712"/>
+            <a:ext cx="685800" cy="283464"/>
           </a:xfrm>
           <a:prstGeom prst="rect">
             <a:avLst/>
@@ -17376,7 +17376,7 @@
         </p:nvSpPr>
         <p:spPr>
           <a:xfrm>
-            <a:off x="10783193" y="4466844"/>
+            <a:off x="10664321" y="4466844"/>
             <a:ext cx="359732" cy="457200"/>
           </a:xfrm>
           <a:prstGeom prst="rect">
@@ -17412,7 +17412,7 @@
         <p:spPr>
           <a:xfrm>
             <a:off x="1554480" y="4905756"/>
-            <a:ext cx="6021068" cy="457200"/>
+            <a:ext cx="9573984" cy="457200"/>
           </a:xfrm>
           <a:prstGeom prst="rect">
             <a:avLst/>
@@ -17433,7 +17433,42 @@
                 </a:solidFill>
                 <a:latin typeface="Lexend"/>
               </a:rPr>
-              <a:t>How far apart are they in a straight line?</a:t>
+              <a:t>How far apart are they in a straight line, to the nearest tenth of a </a:t>
+            </a:r>
+          </a:p>
+        </p:txBody>
+      </p:sp>
+      <p:sp>
+        <p:nvSpPr>
+          <p:cNvPr id="43" name="TextBox 42"/>
+          <p:cNvSpPr txBox="1"/>
+          <p:nvPr/>
+        </p:nvSpPr>
+        <p:spPr>
+          <a:xfrm>
+            <a:off x="1554480" y="5344668"/>
+            <a:ext cx="1706913" cy="457200"/>
+          </a:xfrm>
+          <a:prstGeom prst="rect">
+            <a:avLst/>
+          </a:prstGeom>
+          <a:noFill/>
+        </p:spPr>
+        <p:txBody>
+          <a:bodyPr wrap="none" lIns="45720" rIns="45720" tIns="18288" bIns="18288" anchor="ctr">
+            <a:noAutofit/>
+          </a:bodyPr>
+          <a:lstStyle/>
+          <a:p>
+            <a:pPr algn="l"/>
+            <a:r>
+              <a:rPr sz="2180" b="0" i="0">
+                <a:solidFill>
+                  <a:srgbClr val="1A1A1A"/>
+                </a:solidFill>
+                <a:latin typeface="Lexend"/>
+              </a:rPr>
+              <a:t>kilometer?</a:t>
             </a:r>
           </a:p>
         </p:txBody>
@@ -20034,7 +20069,7 @@
         </p:nvSpPr>
         <p:spPr>
           <a:xfrm>
-            <a:off x="2536605" y="2080260"/>
+            <a:off x="2593565" y="2080260"/>
             <a:ext cx="4220231" cy="457200"/>
           </a:xfrm>
           <a:prstGeom prst="rect">
@@ -20063,7 +20098,7 @@
       </p:sp>
       <p:pic>
         <p:nvPicPr>
-          <p:cNvPr id="9" name="Picture 8" descr="0c90d3ed4c01e3d6.png"/>
+          <p:cNvPr id="9" name="Picture 8" descr="4068972f18107bb5.png"/>
           <p:cNvPicPr>
             <a:picLocks noChangeAspect="1"/>
           </p:cNvPicPr>
@@ -20077,8 +20112,8 @@
         </p:blipFill>
         <p:spPr>
           <a:xfrm>
-            <a:off x="6619677" y="2197798"/>
-            <a:ext cx="1171384" cy="284797"/>
+            <a:off x="6676636" y="2197798"/>
+            <a:ext cx="1057465" cy="284797"/>
           </a:xfrm>
           <a:prstGeom prst="rect">
             <a:avLst/>
@@ -20093,7 +20128,7 @@
         </p:nvSpPr>
         <p:spPr>
           <a:xfrm>
-            <a:off x="7791061" y="2080260"/>
+            <a:off x="7734102" y="2080260"/>
             <a:ext cx="953666" cy="457200"/>
           </a:xfrm>
           <a:prstGeom prst="rect">
@@ -20136,7 +20171,7 @@
         </p:blipFill>
         <p:spPr>
           <a:xfrm>
-            <a:off x="8607568" y="2197798"/>
+            <a:off x="8550609" y="2197798"/>
             <a:ext cx="874204" cy="284797"/>
           </a:xfrm>
           <a:prstGeom prst="rect">
@@ -20152,7 +20187,7 @@
         </p:nvSpPr>
         <p:spPr>
           <a:xfrm>
-            <a:off x="9481773" y="2080260"/>
+            <a:off x="9424813" y="2080260"/>
             <a:ext cx="280301" cy="457200"/>
           </a:xfrm>
           <a:prstGeom prst="rect">

--- a/a7/packages/A7 Unit 6 - Relationships in Triangles/Lessons/6.05/A7 6.05 Distance on the Coordinate Plane - Slides.pptx
+++ b/a7/packages/A7 Unit 6 - Relationships in Triangles/Lessons/6.05/A7 6.05 Distance on the Coordinate Plane - Slides.pptx
@@ -17346,7 +17346,7 @@
       </p:sp>
       <p:pic>
         <p:nvPicPr>
-          <p:cNvPr id="40" name="Picture 39" descr="58e193b7312e2800.png"/>
+          <p:cNvPr id="40" name="Picture 39" descr="85100b15cbd67474.png"/>
           <p:cNvPicPr>
             <a:picLocks noChangeAspect="1"/>
           </p:cNvPicPr>
@@ -17360,8 +17360,8 @@
         </p:blipFill>
         <p:spPr>
           <a:xfrm>
-            <a:off x="9978521" y="4553712"/>
-            <a:ext cx="685800" cy="283464"/>
+            <a:off x="9978521" y="4555236"/>
+            <a:ext cx="710184" cy="280416"/>
           </a:xfrm>
           <a:prstGeom prst="rect">
             <a:avLst/>
@@ -17376,7 +17376,7 @@
         </p:nvSpPr>
         <p:spPr>
           <a:xfrm>
-            <a:off x="10664321" y="4466844"/>
+            <a:off x="10688705" y="4466844"/>
             <a:ext cx="359732" cy="457200"/>
           </a:xfrm>
           <a:prstGeom prst="rect">
